--- a/Cloud_Cost_Optimization_Professional_Deck_Final.pptx
+++ b/Cloud_Cost_Optimization_Professional_Deck_Final.pptx
@@ -318,7 +318,7 @@
           <a:p>
             <a:fld id="{5BCAD085-E8A6-8845-BD4E-CB4CCA059FC4}" type="datetimeFigureOut">
               <a:rPr lang="en-US" smtClean="0"/>
-              <a:t>8/9/2026</a:t>
+              <a:t>8/11/2026</a:t>
             </a:fld>
             <a:endParaRPr lang="en-US"/>
           </a:p>
@@ -486,7 +486,7 @@
           <a:p>
             <a:fld id="{5BCAD085-E8A6-8845-BD4E-CB4CCA059FC4}" type="datetimeFigureOut">
               <a:rPr lang="en-US" smtClean="0"/>
-              <a:t>8/9/2026</a:t>
+              <a:t>8/11/2026</a:t>
             </a:fld>
             <a:endParaRPr lang="en-US"/>
           </a:p>
@@ -664,7 +664,7 @@
           <a:p>
             <a:fld id="{5BCAD085-E8A6-8845-BD4E-CB4CCA059FC4}" type="datetimeFigureOut">
               <a:rPr lang="en-US" smtClean="0"/>
-              <a:t>8/9/2026</a:t>
+              <a:t>8/11/2026</a:t>
             </a:fld>
             <a:endParaRPr lang="en-US"/>
           </a:p>
@@ -832,7 +832,7 @@
           <a:p>
             <a:fld id="{5BCAD085-E8A6-8845-BD4E-CB4CCA059FC4}" type="datetimeFigureOut">
               <a:rPr lang="en-US" smtClean="0"/>
-              <a:t>8/9/2026</a:t>
+              <a:t>8/11/2026</a:t>
             </a:fld>
             <a:endParaRPr lang="en-US"/>
           </a:p>
@@ -1077,7 +1077,7 @@
           <a:p>
             <a:fld id="{5BCAD085-E8A6-8845-BD4E-CB4CCA059FC4}" type="datetimeFigureOut">
               <a:rPr lang="en-US" smtClean="0"/>
-              <a:t>8/9/2026</a:t>
+              <a:t>8/11/2026</a:t>
             </a:fld>
             <a:endParaRPr lang="en-US"/>
           </a:p>
@@ -1362,7 +1362,7 @@
           <a:p>
             <a:fld id="{5BCAD085-E8A6-8845-BD4E-CB4CCA059FC4}" type="datetimeFigureOut">
               <a:rPr lang="en-US" smtClean="0"/>
-              <a:t>8/9/2026</a:t>
+              <a:t>8/11/2026</a:t>
             </a:fld>
             <a:endParaRPr lang="en-US"/>
           </a:p>
@@ -1781,7 +1781,7 @@
           <a:p>
             <a:fld id="{5BCAD085-E8A6-8845-BD4E-CB4CCA059FC4}" type="datetimeFigureOut">
               <a:rPr lang="en-US" smtClean="0"/>
-              <a:t>8/9/2026</a:t>
+              <a:t>8/11/2026</a:t>
             </a:fld>
             <a:endParaRPr lang="en-US"/>
           </a:p>
@@ -1898,7 +1898,7 @@
           <a:p>
             <a:fld id="{5BCAD085-E8A6-8845-BD4E-CB4CCA059FC4}" type="datetimeFigureOut">
               <a:rPr lang="en-US" smtClean="0"/>
-              <a:t>8/9/2026</a:t>
+              <a:t>8/11/2026</a:t>
             </a:fld>
             <a:endParaRPr lang="en-US"/>
           </a:p>
@@ -1993,7 +1993,7 @@
           <a:p>
             <a:fld id="{5BCAD085-E8A6-8845-BD4E-CB4CCA059FC4}" type="datetimeFigureOut">
               <a:rPr lang="en-US" smtClean="0"/>
-              <a:t>8/9/2026</a:t>
+              <a:t>8/11/2026</a:t>
             </a:fld>
             <a:endParaRPr lang="en-US"/>
           </a:p>
@@ -2268,7 +2268,7 @@
           <a:p>
             <a:fld id="{5BCAD085-E8A6-8845-BD4E-CB4CCA059FC4}" type="datetimeFigureOut">
               <a:rPr lang="en-US" smtClean="0"/>
-              <a:t>8/9/2026</a:t>
+              <a:t>8/11/2026</a:t>
             </a:fld>
             <a:endParaRPr lang="en-US"/>
           </a:p>
@@ -2520,7 +2520,7 @@
           <a:p>
             <a:fld id="{5BCAD085-E8A6-8845-BD4E-CB4CCA059FC4}" type="datetimeFigureOut">
               <a:rPr lang="en-US" smtClean="0"/>
-              <a:t>8/9/2026</a:t>
+              <a:t>8/11/2026</a:t>
             </a:fld>
             <a:endParaRPr lang="en-US"/>
           </a:p>
@@ -2731,7 +2731,7 @@
           <a:p>
             <a:fld id="{5BCAD085-E8A6-8845-BD4E-CB4CCA059FC4}" type="datetimeFigureOut">
               <a:rPr lang="en-US" smtClean="0"/>
-              <a:t>8/9/2026</a:t>
+              <a:t>8/11/2026</a:t>
             </a:fld>
             <a:endParaRPr lang="en-US"/>
           </a:p>
@@ -3964,7 +3964,7 @@
         <p:spPr>
           <a:xfrm>
             <a:off x="731520" y="5897880"/>
-            <a:ext cx="7315200" cy="274320"/>
+            <a:ext cx="7315200" cy="230832"/>
           </a:xfrm>
           <a:prstGeom prst="rect">
             <a:avLst/>
@@ -3986,8 +3986,10 @@
               </a:defRPr>
             </a:pPr>
             <a:r>
+              <a:rPr dirty="0"/>
               <a:t>FY2023 Cloud Billing Analysis  |  Kaggle Cloud Budget Dataset</a:t>
             </a:r>
+            <a:endParaRPr lang="en-IN" dirty="0"/>
           </a:p>
         </p:txBody>
       </p:sp>
@@ -4103,6 +4105,49 @@
             </a:pPr>
             <a:r>
               <a:t>1</a:t>
+            </a:r>
+          </a:p>
+        </p:txBody>
+      </p:sp>
+      <p:sp>
+        <p:nvSpPr>
+          <p:cNvPr id="27" name="TextBox 26">
+            <a:extLst>
+              <a:ext uri="{FF2B5EF4-FFF2-40B4-BE49-F238E27FC236}">
+                <a16:creationId xmlns:a16="http://schemas.microsoft.com/office/drawing/2014/main" id="{19C89466-9862-09A6-6A25-FAD36A9CCF6B}"/>
+              </a:ext>
+            </a:extLst>
+          </p:cNvPr>
+          <p:cNvSpPr txBox="1"/>
+          <p:nvPr/>
+        </p:nvSpPr>
+        <p:spPr>
+          <a:xfrm>
+            <a:off x="713232" y="5354643"/>
+            <a:ext cx="10479024" cy="307777"/>
+          </a:xfrm>
+          <a:prstGeom prst="rect">
+            <a:avLst/>
+          </a:prstGeom>
+          <a:noFill/>
+        </p:spPr>
+        <p:txBody>
+          <a:bodyPr wrap="square" anchor="t">
+            <a:spAutoFit/>
+          </a:bodyPr>
+          <a:lstStyle/>
+          <a:p>
+            <a:pPr algn="l">
+              <a:defRPr sz="900" b="0">
+                <a:solidFill>
+                  <a:srgbClr val="B7C7D4"/>
+                </a:solidFill>
+                <a:latin typeface="Aptos"/>
+              </a:defRPr>
+            </a:pPr>
+            <a:r>
+              <a:rPr lang="en-IN" sz="1400" dirty="0"/>
+              <a:t>Presented by Breakout Room 4 – Proma Mondal, Yash Chaudhary, Anurag Vyas, Aditya Marathe, Neam Adil  </a:t>
             </a:r>
           </a:p>
         </p:txBody>
@@ -4631,114 +4676,6 @@
       </p:sp>
       <p:sp>
         <p:nvSpPr>
-          <p:cNvPr id="16" name="TextBox 15"/>
-          <p:cNvSpPr txBox="1"/>
-          <p:nvPr/>
-        </p:nvSpPr>
-        <p:spPr>
-          <a:xfrm>
-            <a:off x="658368" y="1755648"/>
-            <a:ext cx="3200400" cy="182880"/>
-          </a:xfrm>
-          <a:prstGeom prst="rect">
-            <a:avLst/>
-          </a:prstGeom>
-          <a:noFill/>
-        </p:spPr>
-        <p:txBody>
-          <a:bodyPr wrap="square" anchor="t">
-            <a:spAutoFit/>
-          </a:bodyPr>
-          <a:lstStyle/>
-          <a:p>
-            <a:pPr algn="l">
-              <a:defRPr sz="830" b="1">
-                <a:solidFill>
-                  <a:srgbClr val="101D2D"/>
-                </a:solidFill>
-                <a:latin typeface="Aptos"/>
-              </a:defRPr>
-            </a:pPr>
-            <a:r>
-              <a:t>Cost by cloud provider</a:t>
-            </a:r>
-          </a:p>
-        </p:txBody>
-      </p:sp>
-      <p:sp>
-        <p:nvSpPr>
-          <p:cNvPr id="17" name="TextBox 16"/>
-          <p:cNvSpPr txBox="1"/>
-          <p:nvPr/>
-        </p:nvSpPr>
-        <p:spPr>
-          <a:xfrm>
-            <a:off x="4416552" y="1755648"/>
-            <a:ext cx="3200400" cy="182880"/>
-          </a:xfrm>
-          <a:prstGeom prst="rect">
-            <a:avLst/>
-          </a:prstGeom>
-          <a:noFill/>
-        </p:spPr>
-        <p:txBody>
-          <a:bodyPr wrap="square" anchor="t">
-            <a:spAutoFit/>
-          </a:bodyPr>
-          <a:lstStyle/>
-          <a:p>
-            <a:pPr algn="l">
-              <a:defRPr sz="830" b="1">
-                <a:solidFill>
-                  <a:srgbClr val="101D2D"/>
-                </a:solidFill>
-                <a:latin typeface="Aptos"/>
-              </a:defRPr>
-            </a:pPr>
-            <a:r>
-              <a:t>Cost by environment</a:t>
-            </a:r>
-          </a:p>
-        </p:txBody>
-      </p:sp>
-      <p:sp>
-        <p:nvSpPr>
-          <p:cNvPr id="18" name="TextBox 17"/>
-          <p:cNvSpPr txBox="1"/>
-          <p:nvPr/>
-        </p:nvSpPr>
-        <p:spPr>
-          <a:xfrm>
-            <a:off x="658368" y="4151376"/>
-            <a:ext cx="3200400" cy="182880"/>
-          </a:xfrm>
-          <a:prstGeom prst="rect">
-            <a:avLst/>
-          </a:prstGeom>
-          <a:noFill/>
-        </p:spPr>
-        <p:txBody>
-          <a:bodyPr wrap="square" anchor="t">
-            <a:spAutoFit/>
-          </a:bodyPr>
-          <a:lstStyle/>
-          <a:p>
-            <a:pPr algn="l">
-              <a:defRPr sz="830" b="1">
-                <a:solidFill>
-                  <a:srgbClr val="101D2D"/>
-                </a:solidFill>
-                <a:latin typeface="Aptos"/>
-              </a:defRPr>
-            </a:pPr>
-            <a:r>
-              <a:t>Cost efficiency by department</a:t>
-            </a:r>
-          </a:p>
-        </p:txBody>
-      </p:sp>
-      <p:sp>
-        <p:nvSpPr>
           <p:cNvPr id="19" name="Rectangle 18"/>
           <p:cNvSpPr/>
           <p:nvPr/>
@@ -5377,114 +5314,6 @@
       </p:sp>
       <p:sp>
         <p:nvSpPr>
-          <p:cNvPr id="16" name="TextBox 15"/>
-          <p:cNvSpPr txBox="1"/>
-          <p:nvPr/>
-        </p:nvSpPr>
-        <p:spPr>
-          <a:xfrm>
-            <a:off x="658368" y="1755648"/>
-            <a:ext cx="3200400" cy="182880"/>
-          </a:xfrm>
-          <a:prstGeom prst="rect">
-            <a:avLst/>
-          </a:prstGeom>
-          <a:noFill/>
-        </p:spPr>
-        <p:txBody>
-          <a:bodyPr wrap="square" anchor="t">
-            <a:spAutoFit/>
-          </a:bodyPr>
-          <a:lstStyle/>
-          <a:p>
-            <a:pPr algn="l">
-              <a:defRPr sz="830" b="1">
-                <a:solidFill>
-                  <a:srgbClr val="101D2D"/>
-                </a:solidFill>
-                <a:latin typeface="Aptos"/>
-              </a:defRPr>
-            </a:pPr>
-            <a:r>
-              <a:t>Discount utilization</a:t>
-            </a:r>
-          </a:p>
-        </p:txBody>
-      </p:sp>
-      <p:sp>
-        <p:nvSpPr>
-          <p:cNvPr id="17" name="TextBox 16"/>
-          <p:cNvSpPr txBox="1"/>
-          <p:nvPr/>
-        </p:nvSpPr>
-        <p:spPr>
-          <a:xfrm>
-            <a:off x="4416552" y="1755648"/>
-            <a:ext cx="3200400" cy="182880"/>
-          </a:xfrm>
-          <a:prstGeom prst="rect">
-            <a:avLst/>
-          </a:prstGeom>
-          <a:noFill/>
-        </p:spPr>
-        <p:txBody>
-          <a:bodyPr wrap="square" anchor="t">
-            <a:spAutoFit/>
-          </a:bodyPr>
-          <a:lstStyle/>
-          <a:p>
-            <a:pPr algn="l">
-              <a:defRPr sz="830" b="1">
-                <a:solidFill>
-                  <a:srgbClr val="101D2D"/>
-                </a:solidFill>
-                <a:latin typeface="Aptos"/>
-              </a:defRPr>
-            </a:pPr>
-            <a:r>
-              <a:t>BU × Service</a:t>
-            </a:r>
-          </a:p>
-        </p:txBody>
-      </p:sp>
-      <p:sp>
-        <p:nvSpPr>
-          <p:cNvPr id="18" name="TextBox 17"/>
-          <p:cNvSpPr txBox="1"/>
-          <p:nvPr/>
-        </p:nvSpPr>
-        <p:spPr>
-          <a:xfrm>
-            <a:off x="658368" y="4151376"/>
-            <a:ext cx="3200400" cy="182880"/>
-          </a:xfrm>
-          <a:prstGeom prst="rect">
-            <a:avLst/>
-          </a:prstGeom>
-          <a:noFill/>
-        </p:spPr>
-        <p:txBody>
-          <a:bodyPr wrap="square" anchor="t">
-            <a:spAutoFit/>
-          </a:bodyPr>
-          <a:lstStyle/>
-          <a:p>
-            <a:pPr algn="l">
-              <a:defRPr sz="830" b="1">
-                <a:solidFill>
-                  <a:srgbClr val="101D2D"/>
-                </a:solidFill>
-                <a:latin typeface="Aptos"/>
-              </a:defRPr>
-            </a:pPr>
-            <a:r>
-              <a:t>Region × Provider</a:t>
-            </a:r>
-          </a:p>
-        </p:txBody>
-      </p:sp>
-      <p:sp>
-        <p:nvSpPr>
           <p:cNvPr id="19" name="Rectangle 18"/>
           <p:cNvSpPr/>
           <p:nvPr/>
@@ -6123,114 +5952,6 @@
       </p:sp>
       <p:sp>
         <p:nvSpPr>
-          <p:cNvPr id="16" name="TextBox 15"/>
-          <p:cNvSpPr txBox="1"/>
-          <p:nvPr/>
-        </p:nvSpPr>
-        <p:spPr>
-          <a:xfrm>
-            <a:off x="658368" y="1755648"/>
-            <a:ext cx="3200400" cy="182880"/>
-          </a:xfrm>
-          <a:prstGeom prst="rect">
-            <a:avLst/>
-          </a:prstGeom>
-          <a:noFill/>
-        </p:spPr>
-        <p:txBody>
-          <a:bodyPr wrap="square" anchor="t">
-            <a:spAutoFit/>
-          </a:bodyPr>
-          <a:lstStyle/>
-          <a:p>
-            <a:pPr algn="l">
-              <a:defRPr sz="830" b="1">
-                <a:solidFill>
-                  <a:srgbClr val="101D2D"/>
-                </a:solidFill>
-                <a:latin typeface="Aptos"/>
-              </a:defRPr>
-            </a:pPr>
-            <a:r>
-              <a:t>Idle / high-exposure rate</a:t>
-            </a:r>
-          </a:p>
-        </p:txBody>
-      </p:sp>
-      <p:sp>
-        <p:nvSpPr>
-          <p:cNvPr id="17" name="TextBox 16"/>
-          <p:cNvSpPr txBox="1"/>
-          <p:nvPr/>
-        </p:nvSpPr>
-        <p:spPr>
-          <a:xfrm>
-            <a:off x="4416552" y="1755648"/>
-            <a:ext cx="3200400" cy="182880"/>
-          </a:xfrm>
-          <a:prstGeom prst="rect">
-            <a:avLst/>
-          </a:prstGeom>
-          <a:noFill/>
-        </p:spPr>
-        <p:txBody>
-          <a:bodyPr wrap="square" anchor="t">
-            <a:spAutoFit/>
-          </a:bodyPr>
-          <a:lstStyle/>
-          <a:p>
-            <a:pPr algn="l">
-              <a:defRPr sz="830" b="1">
-                <a:solidFill>
-                  <a:srgbClr val="101D2D"/>
-                </a:solidFill>
-                <a:latin typeface="Aptos"/>
-              </a:defRPr>
-            </a:pPr>
-            <a:r>
-              <a:t>Correlation matrix</a:t>
-            </a:r>
-          </a:p>
-        </p:txBody>
-      </p:sp>
-      <p:sp>
-        <p:nvSpPr>
-          <p:cNvPr id="18" name="TextBox 17"/>
-          <p:cNvSpPr txBox="1"/>
-          <p:nvPr/>
-        </p:nvSpPr>
-        <p:spPr>
-          <a:xfrm>
-            <a:off x="658368" y="4151376"/>
-            <a:ext cx="3200400" cy="182880"/>
-          </a:xfrm>
-          <a:prstGeom prst="rect">
-            <a:avLst/>
-          </a:prstGeom>
-          <a:noFill/>
-        </p:spPr>
-        <p:txBody>
-          <a:bodyPr wrap="square" anchor="t">
-            <a:spAutoFit/>
-          </a:bodyPr>
-          <a:lstStyle/>
-          <a:p>
-            <a:pPr algn="l">
-              <a:defRPr sz="830" b="1">
-                <a:solidFill>
-                  <a:srgbClr val="101D2D"/>
-                </a:solidFill>
-                <a:latin typeface="Aptos"/>
-              </a:defRPr>
-            </a:pPr>
-            <a:r>
-              <a:t>Forecast vs actual</a:t>
-            </a:r>
-          </a:p>
-        </p:txBody>
-      </p:sp>
-      <p:sp>
-        <p:nvSpPr>
           <p:cNvPr id="19" name="Rectangle 18"/>
           <p:cNvSpPr/>
           <p:nvPr/>
@@ -12254,10 +11975,22 @@
               <a:t>Repository link: </a:t>
             </a:r>
             <a:r>
-              <a:rPr lang="en-IN" dirty="0"/>
+              <a:rPr lang="en-IN" b="1" dirty="0">
+                <a:solidFill>
+                  <a:schemeClr val="tx2">
+                    <a:lumMod val="50000"/>
+                  </a:schemeClr>
+                </a:solidFill>
+              </a:rPr>
               <a:t>https://github.com/Proms32/Accenture-capstone-project</a:t>
             </a:r>
-            <a:endParaRPr dirty="0"/>
+            <a:endParaRPr b="1" dirty="0">
+              <a:solidFill>
+                <a:schemeClr val="tx2">
+                  <a:lumMod val="50000"/>
+                </a:schemeClr>
+              </a:solidFill>
+            </a:endParaRPr>
           </a:p>
         </p:txBody>
       </p:sp>
@@ -21568,114 +21301,6 @@
       </p:sp>
       <p:sp>
         <p:nvSpPr>
-          <p:cNvPr id="16" name="TextBox 15"/>
-          <p:cNvSpPr txBox="1"/>
-          <p:nvPr/>
-        </p:nvSpPr>
-        <p:spPr>
-          <a:xfrm>
-            <a:off x="658368" y="1755648"/>
-            <a:ext cx="3200400" cy="182880"/>
-          </a:xfrm>
-          <a:prstGeom prst="rect">
-            <a:avLst/>
-          </a:prstGeom>
-          <a:noFill/>
-        </p:spPr>
-        <p:txBody>
-          <a:bodyPr wrap="square" anchor="t">
-            <a:spAutoFit/>
-          </a:bodyPr>
-          <a:lstStyle/>
-          <a:p>
-            <a:pPr algn="l">
-              <a:defRPr sz="830" b="1">
-                <a:solidFill>
-                  <a:srgbClr val="101D2D"/>
-                </a:solidFill>
-                <a:latin typeface="Aptos"/>
-              </a:defRPr>
-            </a:pPr>
-            <a:r>
-              <a:t>Net cost distribution</a:t>
-            </a:r>
-          </a:p>
-        </p:txBody>
-      </p:sp>
-      <p:sp>
-        <p:nvSpPr>
-          <p:cNvPr id="17" name="TextBox 16"/>
-          <p:cNvSpPr txBox="1"/>
-          <p:nvPr/>
-        </p:nvSpPr>
-        <p:spPr>
-          <a:xfrm>
-            <a:off x="4416552" y="1755648"/>
-            <a:ext cx="3200400" cy="182880"/>
-          </a:xfrm>
-          <a:prstGeom prst="rect">
-            <a:avLst/>
-          </a:prstGeom>
-          <a:noFill/>
-        </p:spPr>
-        <p:txBody>
-          <a:bodyPr wrap="square" anchor="t">
-            <a:spAutoFit/>
-          </a:bodyPr>
-          <a:lstStyle/>
-          <a:p>
-            <a:pPr algn="l">
-              <a:defRPr sz="830" b="1">
-                <a:solidFill>
-                  <a:srgbClr val="101D2D"/>
-                </a:solidFill>
-                <a:latin typeface="Aptos"/>
-              </a:defRPr>
-            </a:pPr>
-            <a:r>
-              <a:t>Usage by service</a:t>
-            </a:r>
-          </a:p>
-        </p:txBody>
-      </p:sp>
-      <p:sp>
-        <p:nvSpPr>
-          <p:cNvPr id="18" name="TextBox 17"/>
-          <p:cNvSpPr txBox="1"/>
-          <p:nvPr/>
-        </p:nvSpPr>
-        <p:spPr>
-          <a:xfrm>
-            <a:off x="658368" y="4151376"/>
-            <a:ext cx="3200400" cy="182880"/>
-          </a:xfrm>
-          <a:prstGeom prst="rect">
-            <a:avLst/>
-          </a:prstGeom>
-          <a:noFill/>
-        </p:spPr>
-        <p:txBody>
-          <a:bodyPr wrap="square" anchor="t">
-            <a:spAutoFit/>
-          </a:bodyPr>
-          <a:lstStyle/>
-          <a:p>
-            <a:pPr algn="l">
-              <a:defRPr sz="830" b="1">
-                <a:solidFill>
-                  <a:srgbClr val="101D2D"/>
-                </a:solidFill>
-                <a:latin typeface="Aptos"/>
-              </a:defRPr>
-            </a:pPr>
-            <a:r>
-              <a:t>Anomaly score</a:t>
-            </a:r>
-          </a:p>
-        </p:txBody>
-      </p:sp>
-      <p:sp>
-        <p:nvSpPr>
           <p:cNvPr id="19" name="Rectangle 18"/>
           <p:cNvSpPr/>
           <p:nvPr/>
@@ -22308,114 +21933,6 @@
             </a:pPr>
             <a:r>
               <a:t>Spend increased 38.5% from January to December. All five business units sit within a narrow spending band, so the increase is not explained by one department or BU.</a:t>
-            </a:r>
-          </a:p>
-        </p:txBody>
-      </p:sp>
-      <p:sp>
-        <p:nvSpPr>
-          <p:cNvPr id="16" name="TextBox 15"/>
-          <p:cNvSpPr txBox="1"/>
-          <p:nvPr/>
-        </p:nvSpPr>
-        <p:spPr>
-          <a:xfrm>
-            <a:off x="658368" y="1755648"/>
-            <a:ext cx="3200400" cy="182880"/>
-          </a:xfrm>
-          <a:prstGeom prst="rect">
-            <a:avLst/>
-          </a:prstGeom>
-          <a:noFill/>
-        </p:spPr>
-        <p:txBody>
-          <a:bodyPr wrap="square" anchor="t">
-            <a:spAutoFit/>
-          </a:bodyPr>
-          <a:lstStyle/>
-          <a:p>
-            <a:pPr algn="l">
-              <a:defRPr sz="830" b="1">
-                <a:solidFill>
-                  <a:srgbClr val="101D2D"/>
-                </a:solidFill>
-                <a:latin typeface="Aptos"/>
-              </a:defRPr>
-            </a:pPr>
-            <a:r>
-              <a:t>Monthly net cost</a:t>
-            </a:r>
-          </a:p>
-        </p:txBody>
-      </p:sp>
-      <p:sp>
-        <p:nvSpPr>
-          <p:cNvPr id="17" name="TextBox 16"/>
-          <p:cNvSpPr txBox="1"/>
-          <p:nvPr/>
-        </p:nvSpPr>
-        <p:spPr>
-          <a:xfrm>
-            <a:off x="4416552" y="1755648"/>
-            <a:ext cx="3200400" cy="182880"/>
-          </a:xfrm>
-          <a:prstGeom prst="rect">
-            <a:avLst/>
-          </a:prstGeom>
-          <a:noFill/>
-        </p:spPr>
-        <p:txBody>
-          <a:bodyPr wrap="square" anchor="t">
-            <a:spAutoFit/>
-          </a:bodyPr>
-          <a:lstStyle/>
-          <a:p>
-            <a:pPr algn="l">
-              <a:defRPr sz="830" b="1">
-                <a:solidFill>
-                  <a:srgbClr val="101D2D"/>
-                </a:solidFill>
-                <a:latin typeface="Aptos"/>
-              </a:defRPr>
-            </a:pPr>
-            <a:r>
-              <a:t>Cost by business unit</a:t>
-            </a:r>
-          </a:p>
-        </p:txBody>
-      </p:sp>
-      <p:sp>
-        <p:nvSpPr>
-          <p:cNvPr id="18" name="TextBox 17"/>
-          <p:cNvSpPr txBox="1"/>
-          <p:nvPr/>
-        </p:nvSpPr>
-        <p:spPr>
-          <a:xfrm>
-            <a:off x="658368" y="4151376"/>
-            <a:ext cx="3200400" cy="182880"/>
-          </a:xfrm>
-          <a:prstGeom prst="rect">
-            <a:avLst/>
-          </a:prstGeom>
-          <a:noFill/>
-        </p:spPr>
-        <p:txBody>
-          <a:bodyPr wrap="square" anchor="t">
-            <a:spAutoFit/>
-          </a:bodyPr>
-          <a:lstStyle/>
-          <a:p>
-            <a:pPr algn="l">
-              <a:defRPr sz="830" b="1">
-                <a:solidFill>
-                  <a:srgbClr val="101D2D"/>
-                </a:solidFill>
-                <a:latin typeface="Aptos"/>
-              </a:defRPr>
-            </a:pPr>
-            <a:r>
-              <a:t>Cost by department</a:t>
             </a:r>
           </a:p>
         </p:txBody>
